--- a/docs/Slide08_periodic_table.pptx
+++ b/docs/Slide08_periodic_table.pptx
@@ -1546,7 +1546,7 @@
                 <a:ea typeface="Arial"/>
                 <a:cs typeface="Arial"/>
               </a:rPr>
-              <a:t>Late transition metals sit together in </a:t>
+              <a:t>Late transition metals (Fe–Cu) form the </a:t>
             </a:r>
             <a:r>
               <a:rPr sz="1275" b="1">
@@ -1568,7 +1568,7 @@
                 <a:ea typeface="Arial"/>
                 <a:cs typeface="Arial"/>
               </a:rPr>
-              <a:t> — that block is the oxidation-window loss.</a:t>
+              <a:t> block — their oxidation window is the narrowest.</a:t>
             </a:r>
           </a:p>
         </p:txBody>
@@ -1676,37 +1676,26 @@
               </a:defRPr>
             </a:pPr>
             <a:r>
-              <a:rPr sz="1275">
-                <a:solidFill>
-                  <a:srgbClr val="1F2937"/>
+              <a:rPr sz="1275" b="1">
+                <a:solidFill>
+                  <a:srgbClr val="2563EB"/>
                 </a:solidFill>
                 <a:latin typeface="Arial"/>
                 <a:ea typeface="Arial"/>
                 <a:cs typeface="Arial"/>
               </a:rPr>
-              <a:t>Read the </a:t>
+              <a:t>Group trends</a:t>
             </a:r>
             <a:r>
-              <a:rPr sz="1275" b="1">
-                <a:solidFill>
-                  <a:srgbClr val="2563EB"/>
+              <a:rPr sz="1275" b="0">
+                <a:solidFill>
+                  <a:srgbClr val="374151"/>
                 </a:solidFill>
                 <a:latin typeface="Arial"/>
                 <a:ea typeface="Arial"/>
                 <a:cs typeface="Arial"/>
               </a:rPr>
-              <a:t>block pattern</a:t>
-            </a:r>
-            <a:r>
-              <a:rPr sz="1275" b="0">
-                <a:solidFill>
-                  <a:srgbClr val="374151"/>
-                </a:solidFill>
-                <a:latin typeface="Arial"/>
-                <a:ea typeface="Arial"/>
-                <a:cs typeface="Arial"/>
-              </a:rPr>
-              <a:t>, not the ranking — doubling the pool left both ends unchanged.</a:t>
+              <a:t> are robust, individual rankings are not — doubling the set kept both ends.</a:t>
             </a:r>
           </a:p>
         </p:txBody>
@@ -1983,7 +1972,7 @@
                 </a:solidFill>
                 <a:latin typeface="Arial"/>
               </a:rPr>
-              <a:t> — the block structure is what this figure supports</a:t>
+              <a:t> — this figure supports the group trend, not the order</a:t>
             </a:r>
           </a:p>
         </p:txBody>

--- a/docs/Slide08_periodic_table.pptx
+++ b/docs/Slide08_periodic_table.pptx
@@ -1695,7 +1695,7 @@
                 <a:ea typeface="Arial"/>
                 <a:cs typeface="Arial"/>
               </a:rPr>
-              <a:t> are robust, individual rankings are not — doubling the set kept both ends.</a:t>
+              <a:t> are robust, the exact order is not — the same elements stay at both ends.</a:t>
             </a:r>
           </a:p>
         </p:txBody>
@@ -1972,7 +1972,7 @@
                 </a:solidFill>
                 <a:latin typeface="Arial"/>
               </a:rPr>
-              <a:t> — this figure supports the group trend, not the order</a:t>
+              <a:t> — the same elements stayed top and bottom when the set doubled (47 → 89)</a:t>
             </a:r>
           </a:p>
         </p:txBody>

--- a/docs/Slide08_periodic_table.pptx
+++ b/docs/Slide08_periodic_table.pptx
@@ -1430,7 +1430,7 @@
                 <a:ea typeface="Arial"/>
                 <a:cs typeface="Arial"/>
               </a:rPr>
-              <a:t>Candidate set (2): 36 cation elements, coloured by their best score</a:t>
+              <a:t>Candidate set (2): 36 cation elements, colored by their best score</a:t>
             </a:r>
           </a:p>
         </p:txBody>
